--- a/classes/parte-17-profundizacion-para-certificaciones/320-gobierno-aspectos-legales-regulatorios-y-gestion-del-programa/clase-320-presentacion.pptx
+++ b/classes/parte-17-profundizacion-para-certificaciones/320-gobierno-aspectos-legales-regulatorios-y-gestion-del-programa/clase-320-presentacion.pptx
@@ -17,6 +17,10 @@
     <p:sldId id="265" r:id="rId16"/>
     <p:sldId id="266" r:id="rId17"/>
     <p:sldId id="267" r:id="rId18"/>
+    <p:sldId id="268" r:id="rId19"/>
+    <p:sldId id="269" r:id="rId20"/>
+    <p:sldId id="270" r:id="rId21"/>
+    <p:sldId id="271" r:id="rId22"/>
   </p:sldIdLst>
   <p:sldSz cx="9144000" cy="6858000" type="screen4x3"/>
   <p:notesSz cx="6858000" cy="9144000"/>
@@ -3198,7 +3202,7 @@
                   <a:srgbClr val="0B3D2E"/>
                 </a:solidFill>
               </a:rPr>
-              <a:t>⚠️ Errores comunes</a:t>
+              <a:t>🧪 Laboratorio guiado — Redactar una política y mapearla a marcos y regulación</a:t>
             </a:r>
           </a:p>
         </p:txBody>
@@ -3236,82 +3240,97 @@
                   <a:srgbClr val="22282E"/>
                 </a:solidFill>
               </a:rPr>
-              <a:t>•  "Mi política tiene pasos operativos detallados" — Confusión de niveles. La política es de alto nivel; los pasos van en el procedimiento.</a:t>
-            </a:r>
-          </a:p>
-          <a:p>
-            <a:pPr>
-              <a:spcAft>
-                <a:spcPts val="600"/>
-              </a:spcAft>
-            </a:pPr>
-            <a:r>
-              <a:rPr sz="1500">
-                <a:solidFill>
-                  <a:srgbClr val="22282E"/>
-                </a:solidFill>
-              </a:rPr>
-              <a:t>•  "Elijo un solo marco y descarto el resto" — Los marcos se combinan. Usa CSF/ISO como estructura y CIS/800-53 para controles concretos.</a:t>
-            </a:r>
-          </a:p>
-          <a:p>
-            <a:pPr>
-              <a:spcAft>
-                <a:spcPts val="600"/>
-              </a:spcAft>
-            </a:pPr>
-            <a:r>
-              <a:rPr sz="1500">
-                <a:solidFill>
-                  <a:srgbClr val="22282E"/>
-                </a:solidFill>
-              </a:rPr>
-              <a:t>•  "Cumplo el marco, luego cumplo la ley" — Marco ≠ regulación. Mapea explícitamente cada obligación legal; un marco no garantiza cumplimiento.</a:t>
-            </a:r>
-          </a:p>
-          <a:p>
-            <a:pPr>
-              <a:spcAft>
-                <a:spcPts val="600"/>
-              </a:spcAft>
-            </a:pPr>
-            <a:r>
-              <a:rPr sz="1500">
-                <a:solidFill>
-                  <a:srgbClr val="22282E"/>
-                </a:solidFill>
-              </a:rPr>
-              <a:t>•  "Reporto solo KPIs" — Los KPIs miran atrás. Añade KRIs para anticipar riesgo antes de que se materialice.</a:t>
-            </a:r>
-          </a:p>
-          <a:p>
-            <a:pPr>
-              <a:spcAft>
-                <a:spcPts val="600"/>
-              </a:spcAft>
-            </a:pPr>
-            <a:r>
-              <a:rPr sz="1500">
-                <a:solidFill>
-                  <a:srgbClr val="22282E"/>
-                </a:solidFill>
-              </a:rPr>
-              <a:t>•  "Nadie aprueba ni revisa las políticas" — Sin dueño ni cadencia, la política queda obsoleta. Asigna aprobador y revisión anual.</a:t>
-            </a:r>
-          </a:p>
-          <a:p>
-            <a:pPr>
-              <a:spcAft>
-                <a:spcPts val="600"/>
-              </a:spcAft>
-            </a:pPr>
-            <a:r>
-              <a:rPr sz="1500">
-                <a:solidFill>
-                  <a:srgbClr val="22282E"/>
-                </a:solidFill>
-              </a:rPr>
-              <a:t>•  "Mido madurez por número de controles" — La madurez es repetibilidad y medición del proceso, no cantidad de controles.</a:t>
+              <a:t>•  Ejercicio aplicado: redactarás una política de seguridad de una organización ficticia y la conectarás con marcos, regulación y métricas.</a:t>
+            </a:r>
+          </a:p>
+          <a:p>
+            <a:pPr>
+              <a:spcAft>
+                <a:spcPts val="600"/>
+              </a:spcAft>
+            </a:pPr>
+            <a:r>
+              <a:rPr sz="1500">
+                <a:solidFill>
+                  <a:srgbClr val="22282E"/>
+                </a:solidFill>
+              </a:rPr>
+              <a:t>•  Define el contexto. Elige una organización ficticia (p. ej. clínica que procesa datos de salud y pagos con tarjeta). Identifica qué regulaciones aplican (HIPAA por salud, PCI DSS por tarjetas…</a:t>
+            </a:r>
+          </a:p>
+          <a:p>
+            <a:pPr>
+              <a:spcAft>
+                <a:spcPts val="600"/>
+              </a:spcAft>
+            </a:pPr>
+            <a:r>
+              <a:rPr sz="1500">
+                <a:solidFill>
+                  <a:srgbClr val="22282E"/>
+                </a:solidFill>
+              </a:rPr>
+              <a:t>•  Establece el gobierno. Dibuja el organigrama: junta directiva → CISO → equipos. Define un RACI para "aprobación de políticas" y "respuesta a incidentes".</a:t>
+            </a:r>
+          </a:p>
+          <a:p>
+            <a:pPr>
+              <a:spcAft>
+                <a:spcPts val="600"/>
+              </a:spcAft>
+            </a:pPr>
+            <a:r>
+              <a:rPr sz="1500">
+                <a:solidFill>
+                  <a:srgbClr val="22282E"/>
+                </a:solidFill>
+              </a:rPr>
+              <a:t>•  Redacta la política madre. Una Política de Seguridad de la Información de alto nivel: propósito, alcance, roles, principios (CIA), cumplimiento y sanciones, y quién la aprueba/revisa (cadencia anual).</a:t>
+            </a:r>
+          </a:p>
+          <a:p>
+            <a:pPr>
+              <a:spcAft>
+                <a:spcPts val="600"/>
+              </a:spcAft>
+            </a:pPr>
+            <a:r>
+              <a:rPr sz="1500">
+                <a:solidFill>
+                  <a:srgbClr val="22282E"/>
+                </a:solidFill>
+              </a:rPr>
+              <a:t>•  Deriva la jerarquía. Para un tema (p. ej. control de acceso), escribe: la política (declaración), un estándar (MFA obligatorio para accesos privilegiados), un procedimiento (pasos de alta/baja de…</a:t>
+            </a:r>
+          </a:p>
+          <a:p>
+            <a:pPr>
+              <a:spcAft>
+                <a:spcPts val="600"/>
+              </a:spcAft>
+            </a:pPr>
+            <a:r>
+              <a:rPr sz="1500">
+                <a:solidFill>
+                  <a:srgbClr val="22282E"/>
+                </a:solidFill>
+              </a:rPr>
+              <a:t>•  Elige un marco base. Selecciona NIST CSF 2.0 o ISO 27001 y justifica por qué encaja con el contexto.</a:t>
+            </a:r>
+          </a:p>
+          <a:p>
+            <a:pPr>
+              <a:spcAft>
+                <a:spcPts val="600"/>
+              </a:spcAft>
+            </a:pPr>
+            <a:r>
+              <a:rPr sz="1500">
+                <a:solidFill>
+                  <a:srgbClr val="22282E"/>
+                </a:solidFill>
+              </a:rPr>
+              <a:t>•  Mapea controles. En la hoja de cálculo, cruza: requisito de la política → función/control del marco (p. ej. CSF PR.AA) → requisito regulatorio (p. ej. PCI DSS 8.x, HIPAA §164.312). Marca cobertura y…</a:t>
             </a:r>
           </a:p>
         </p:txBody>
@@ -3362,7 +3381,7 @@
                   <a:srgbClr val="0B3D2E"/>
                 </a:solidFill>
               </a:rPr>
-              <a:t>❓ Preguntas frecuentes</a:t>
+              <a:t>✍️ Ejercicios</a:t>
             </a:r>
           </a:p>
         </p:txBody>
@@ -3400,97 +3419,82 @@
                   <a:srgbClr val="22282E"/>
                 </a:solidFill>
               </a:rPr>
-              <a:t>•  ❓ ¿Cuál es la diferencia entre gobierno y gestión?</a:t>
-            </a:r>
-          </a:p>
-          <a:p>
-            <a:pPr>
-              <a:spcAft>
-                <a:spcPts val="600"/>
-              </a:spcAft>
-            </a:pPr>
-            <a:r>
-              <a:rPr sz="1500">
-                <a:solidFill>
-                  <a:srgbClr val="22282E"/>
-                </a:solidFill>
-              </a:rPr>
-              <a:t>•  El gobierno fija la dirección, el apetito de riesgo y la rendición de cuentas (nivel junta/CISO); la gestión ejecuta esa dirección con procesos y controles. Gobierno decide qué y por qué; gestión, cómo.</a:t>
-            </a:r>
-          </a:p>
-          <a:p>
-            <a:pPr>
-              <a:spcAft>
-                <a:spcPts val="600"/>
-              </a:spcAft>
-            </a:pPr>
-            <a:r>
-              <a:rPr sz="1500">
-                <a:solidFill>
-                  <a:srgbClr val="22282E"/>
-                </a:solidFill>
-              </a:rPr>
-              <a:t>•  ❓ ¿ISO 27001 o NIST CSF?</a:t>
-            </a:r>
-          </a:p>
-          <a:p>
-            <a:pPr>
-              <a:spcAft>
-                <a:spcPts val="600"/>
-              </a:spcAft>
-            </a:pPr>
-            <a:r>
-              <a:rPr sz="1500">
-                <a:solidFill>
-                  <a:srgbClr val="22282E"/>
-                </a:solidFill>
-              </a:rPr>
-              <a:t>•  ISO 27001 es certificable y orientado a un SGSI auditable por terceros; NIST CSF 2.0 es flexible y basado en resultados/funciones. Muchas organizaciones usan CSF para comunicar postura y 27001/800-53 para el detalle de controles.</a:t>
-            </a:r>
-          </a:p>
-          <a:p>
-            <a:pPr>
-              <a:spcAft>
-                <a:spcPts val="600"/>
-              </a:spcAft>
-            </a:pPr>
-            <a:r>
-              <a:rPr sz="1500">
-                <a:solidFill>
-                  <a:srgbClr val="22282E"/>
-                </a:solidFill>
-              </a:rPr>
-              <a:t>•  ❓ ¿Qué es más importante, cumplir la regulación o reducir riesgo?</a:t>
-            </a:r>
-          </a:p>
-          <a:p>
-            <a:pPr>
-              <a:spcAft>
-                <a:spcPts val="600"/>
-              </a:spcAft>
-            </a:pPr>
-            <a:r>
-              <a:rPr sz="1500">
-                <a:solidFill>
-                  <a:srgbClr val="22282E"/>
-                </a:solidFill>
-              </a:rPr>
-              <a:t>•  Ambos, pero no son lo mismo: el cumplimiento es un piso mínimo obligatorio; la gestión de riesgo puede exigir más. Un programa maduro cumple la ley y trata el riesgo residual según su apetito.</a:t>
-            </a:r>
-          </a:p>
-          <a:p>
-            <a:pPr>
-              <a:spcAft>
-                <a:spcPts val="600"/>
-              </a:spcAft>
-            </a:pPr>
-            <a:r>
-              <a:rPr sz="1500">
-                <a:solidFill>
-                  <a:srgbClr val="22282E"/>
-                </a:solidFill>
-              </a:rPr>
-              <a:t>•  ❓ ¿Cada cuánto se revisan las políticas?</a:t>
+              <a:t>•  Clasifica cinco enunciados como política, estándar, procedimiento o guía y corrige los mal ubicados.</a:t>
+            </a:r>
+          </a:p>
+          <a:p>
+            <a:pPr>
+              <a:spcAft>
+                <a:spcPts val="600"/>
+              </a:spcAft>
+            </a:pPr>
+            <a:r>
+              <a:rPr sz="1500">
+                <a:solidFill>
+                  <a:srgbClr val="22282E"/>
+                </a:solidFill>
+              </a:rPr>
+              <a:t>•  Mapea tres controles a NIST CSF 2.0 y al artículo/requisito correspondiente de una regulación.</a:t>
+            </a:r>
+          </a:p>
+          <a:p>
+            <a:pPr>
+              <a:spcAft>
+                <a:spcPts val="600"/>
+              </a:spcAft>
+            </a:pPr>
+            <a:r>
+              <a:rPr sz="1500">
+                <a:solidFill>
+                  <a:srgbClr val="22282E"/>
+                </a:solidFill>
+              </a:rPr>
+              <a:t>•  Explica con un caso la diferencia entre due care y due diligence y cómo cada una reduce responsabilidad legal.</a:t>
+            </a:r>
+          </a:p>
+          <a:p>
+            <a:pPr>
+              <a:spcAft>
+                <a:spcPts val="600"/>
+              </a:spcAft>
+            </a:pPr>
+            <a:r>
+              <a:rPr sz="1500">
+                <a:solidFill>
+                  <a:srgbClr val="22282E"/>
+                </a:solidFill>
+              </a:rPr>
+              <a:t>•  Diseña un RACI para el proceso de gestión de cambios de seguridad.</a:t>
+            </a:r>
+          </a:p>
+          <a:p>
+            <a:pPr>
+              <a:spcAft>
+                <a:spcPts val="600"/>
+              </a:spcAft>
+            </a:pPr>
+            <a:r>
+              <a:rPr sz="1500">
+                <a:solidFill>
+                  <a:srgbClr val="22282E"/>
+                </a:solidFill>
+              </a:rPr>
+              <a:t>•  Define dos KRIs con umbral que anticipen un incidente de accesos.</a:t>
+            </a:r>
+          </a:p>
+          <a:p>
+            <a:pPr>
+              <a:spcAft>
+                <a:spcPts val="600"/>
+              </a:spcAft>
+            </a:pPr>
+            <a:r>
+              <a:rPr sz="1500">
+                <a:solidFill>
+                  <a:srgbClr val="22282E"/>
+                </a:solidFill>
+              </a:rPr>
+              <a:t>•  Sitúa un programa descrito en un nivel CMMI y justifica el diagnóstico.</a:t>
             </a:r>
           </a:p>
         </p:txBody>
@@ -3541,7 +3545,7 @@
                   <a:srgbClr val="0B3D2E"/>
                 </a:solidFill>
               </a:rPr>
-              <a:t>🔗 Referencias</a:t>
+              <a:t>📝 Reto verificable</a:t>
             </a:r>
           </a:p>
         </p:txBody>
@@ -3579,6 +3583,528 @@
                   <a:srgbClr val="22282E"/>
                 </a:solidFill>
               </a:rPr>
+              <a:t>•  Reto: entrega el paquete de gobierno de una organización ficticia: política madre + jerarquía documental de un dominio + matriz de mapeo (marco ↔ regulación) + registro de riesgos + cuadro de…</a:t>
+            </a:r>
+          </a:p>
+          <a:p>
+            <a:pPr>
+              <a:spcAft>
+                <a:spcPts val="600"/>
+              </a:spcAft>
+            </a:pPr>
+            <a:r>
+              <a:rPr sz="1500">
+                <a:solidFill>
+                  <a:srgbClr val="22282E"/>
+                </a:solidFill>
+              </a:rPr>
+              <a:t>•  Criterio de aceptación:</a:t>
+            </a:r>
+          </a:p>
+          <a:p>
+            <a:pPr>
+              <a:spcAft>
+                <a:spcPts val="600"/>
+              </a:spcAft>
+            </a:pPr>
+            <a:r>
+              <a:rPr sz="1500">
+                <a:solidFill>
+                  <a:srgbClr val="22282E"/>
+                </a:solidFill>
+              </a:rPr>
+              <a:t>•  La política madre incluye propósito, alcance, roles, cumplimiento, sanciones y cadencia de revisión con aprobador identificado.</a:t>
+            </a:r>
+          </a:p>
+          <a:p>
+            <a:pPr>
+              <a:spcAft>
+                <a:spcPts val="600"/>
+              </a:spcAft>
+            </a:pPr>
+            <a:r>
+              <a:rPr sz="1500">
+                <a:solidFill>
+                  <a:srgbClr val="22282E"/>
+                </a:solidFill>
+              </a:rPr>
+              <a:t>•  Se distinguen correctamente política, estándar, procedimiento y guía para el dominio elegido.</a:t>
+            </a:r>
+          </a:p>
+          <a:p>
+            <a:pPr>
+              <a:spcAft>
+                <a:spcPts val="600"/>
+              </a:spcAft>
+            </a:pPr>
+            <a:r>
+              <a:rPr sz="1500">
+                <a:solidFill>
+                  <a:srgbClr val="22282E"/>
+                </a:solidFill>
+              </a:rPr>
+              <a:t>•  El mapeo conecta cada requisito con un control de marco y un requisito regulatorio aplicable, señalando huecos.</a:t>
+            </a:r>
+          </a:p>
+          <a:p>
+            <a:pPr>
+              <a:spcAft>
+                <a:spcPts val="600"/>
+              </a:spcAft>
+            </a:pPr>
+            <a:r>
+              <a:rPr sz="1500">
+                <a:solidFill>
+                  <a:srgbClr val="22282E"/>
+                </a:solidFill>
+              </a:rPr>
+              <a:t>•  El registro de riesgos usa probabilidad × impacto, dueño y tratamiento coherente con el apetito de riesgo.</a:t>
+            </a:r>
+          </a:p>
+          <a:p>
+            <a:pPr>
+              <a:spcAft>
+                <a:spcPts val="600"/>
+              </a:spcAft>
+            </a:pPr>
+            <a:r>
+              <a:rPr sz="1500">
+                <a:solidFill>
+                  <a:srgbClr val="22282E"/>
+                </a:solidFill>
+              </a:rPr>
+              <a:t>•  Hay al menos 3 KPIs y 2 KRIs con umbral y frecuencia, más una evaluación de madurez con acción de mejora.</a:t>
+            </a:r>
+          </a:p>
+        </p:txBody>
+      </p:sp>
+    </p:spTree>
+  </p:cSld>
+  <p:clrMapOvr>
+    <a:masterClrMapping/>
+  </p:clrMapOvr>
+</p:sld>
+</file>
+
+<file path=ppt/slides/slide13.xml><?xml version="1.0" encoding="utf-8"?>
+<p:sld xmlns:a="http://schemas.openxmlformats.org/drawingml/2006/main" xmlns:p="http://schemas.openxmlformats.org/presentationml/2006/main" xmlns:r="http://schemas.openxmlformats.org/officeDocument/2006/relationships">
+  <p:cSld>
+    <p:spTree>
+      <p:nvGrpSpPr>
+        <p:cNvPr id="1" name=""/>
+        <p:cNvGrpSpPr/>
+        <p:nvPr/>
+      </p:nvGrpSpPr>
+      <p:grpSpPr/>
+      <p:sp>
+        <p:nvSpPr>
+          <p:cNvPr id="2" name="TextBox 1"/>
+          <p:cNvSpPr txBox="1"/>
+          <p:nvPr/>
+        </p:nvSpPr>
+        <p:spPr>
+          <a:xfrm>
+            <a:off x="457200" y="320040"/>
+            <a:ext cx="8229600" cy="822960"/>
+          </a:xfrm>
+          <a:prstGeom prst="rect">
+            <a:avLst/>
+          </a:prstGeom>
+          <a:noFill/>
+        </p:spPr>
+        <p:txBody>
+          <a:bodyPr wrap="square">
+            <a:spAutoFit/>
+          </a:bodyPr>
+          <a:lstStyle/>
+          <a:p>
+            <a:r>
+              <a:rPr sz="2600" b="1">
+                <a:solidFill>
+                  <a:srgbClr val="0B3D2E"/>
+                </a:solidFill>
+              </a:rPr>
+              <a:t>⚠️ Errores comunes</a:t>
+            </a:r>
+          </a:p>
+        </p:txBody>
+      </p:sp>
+      <p:sp>
+        <p:nvSpPr>
+          <p:cNvPr id="3" name="TextBox 2"/>
+          <p:cNvSpPr txBox="1"/>
+          <p:nvPr/>
+        </p:nvSpPr>
+        <p:spPr>
+          <a:xfrm>
+            <a:off x="457200" y="1280160"/>
+            <a:ext cx="8229600" cy="4937760"/>
+          </a:xfrm>
+          <a:prstGeom prst="rect">
+            <a:avLst/>
+          </a:prstGeom>
+          <a:noFill/>
+        </p:spPr>
+        <p:txBody>
+          <a:bodyPr wrap="square">
+            <a:spAutoFit/>
+          </a:bodyPr>
+          <a:lstStyle/>
+          <a:p>
+            <a:pPr>
+              <a:spcAft>
+                <a:spcPts val="600"/>
+              </a:spcAft>
+            </a:pPr>
+            <a:r>
+              <a:rPr sz="1500">
+                <a:solidFill>
+                  <a:srgbClr val="22282E"/>
+                </a:solidFill>
+              </a:rPr>
+              <a:t>•  "Mi política tiene pasos operativos detallados" — Confusión de niveles. La política es de alto nivel; los pasos van en el procedimiento.</a:t>
+            </a:r>
+          </a:p>
+          <a:p>
+            <a:pPr>
+              <a:spcAft>
+                <a:spcPts val="600"/>
+              </a:spcAft>
+            </a:pPr>
+            <a:r>
+              <a:rPr sz="1500">
+                <a:solidFill>
+                  <a:srgbClr val="22282E"/>
+                </a:solidFill>
+              </a:rPr>
+              <a:t>•  "Elijo un solo marco y descarto el resto" — Los marcos se combinan. Usa CSF/ISO como estructura y CIS/800-53 para controles concretos.</a:t>
+            </a:r>
+          </a:p>
+          <a:p>
+            <a:pPr>
+              <a:spcAft>
+                <a:spcPts val="600"/>
+              </a:spcAft>
+            </a:pPr>
+            <a:r>
+              <a:rPr sz="1500">
+                <a:solidFill>
+                  <a:srgbClr val="22282E"/>
+                </a:solidFill>
+              </a:rPr>
+              <a:t>•  "Cumplo el marco, luego cumplo la ley" — Marco ≠ regulación. Mapea explícitamente cada obligación legal; un marco no garantiza cumplimiento.</a:t>
+            </a:r>
+          </a:p>
+          <a:p>
+            <a:pPr>
+              <a:spcAft>
+                <a:spcPts val="600"/>
+              </a:spcAft>
+            </a:pPr>
+            <a:r>
+              <a:rPr sz="1500">
+                <a:solidFill>
+                  <a:srgbClr val="22282E"/>
+                </a:solidFill>
+              </a:rPr>
+              <a:t>•  "Reporto solo KPIs" — Los KPIs miran atrás. Añade KRIs para anticipar riesgo antes de que se materialice.</a:t>
+            </a:r>
+          </a:p>
+          <a:p>
+            <a:pPr>
+              <a:spcAft>
+                <a:spcPts val="600"/>
+              </a:spcAft>
+            </a:pPr>
+            <a:r>
+              <a:rPr sz="1500">
+                <a:solidFill>
+                  <a:srgbClr val="22282E"/>
+                </a:solidFill>
+              </a:rPr>
+              <a:t>•  "Nadie aprueba ni revisa las políticas" — Sin dueño ni cadencia, la política queda obsoleta. Asigna aprobador y revisión anual.</a:t>
+            </a:r>
+          </a:p>
+          <a:p>
+            <a:pPr>
+              <a:spcAft>
+                <a:spcPts val="600"/>
+              </a:spcAft>
+            </a:pPr>
+            <a:r>
+              <a:rPr sz="1500">
+                <a:solidFill>
+                  <a:srgbClr val="22282E"/>
+                </a:solidFill>
+              </a:rPr>
+              <a:t>•  "Mido madurez por número de controles" — La madurez es repetibilidad y medición del proceso, no cantidad de controles.</a:t>
+            </a:r>
+          </a:p>
+        </p:txBody>
+      </p:sp>
+    </p:spTree>
+  </p:cSld>
+  <p:clrMapOvr>
+    <a:masterClrMapping/>
+  </p:clrMapOvr>
+</p:sld>
+</file>
+
+<file path=ppt/slides/slide14.xml><?xml version="1.0" encoding="utf-8"?>
+<p:sld xmlns:a="http://schemas.openxmlformats.org/drawingml/2006/main" xmlns:p="http://schemas.openxmlformats.org/presentationml/2006/main" xmlns:r="http://schemas.openxmlformats.org/officeDocument/2006/relationships">
+  <p:cSld>
+    <p:spTree>
+      <p:nvGrpSpPr>
+        <p:cNvPr id="1" name=""/>
+        <p:cNvGrpSpPr/>
+        <p:nvPr/>
+      </p:nvGrpSpPr>
+      <p:grpSpPr/>
+      <p:sp>
+        <p:nvSpPr>
+          <p:cNvPr id="2" name="TextBox 1"/>
+          <p:cNvSpPr txBox="1"/>
+          <p:nvPr/>
+        </p:nvSpPr>
+        <p:spPr>
+          <a:xfrm>
+            <a:off x="457200" y="320040"/>
+            <a:ext cx="8229600" cy="822960"/>
+          </a:xfrm>
+          <a:prstGeom prst="rect">
+            <a:avLst/>
+          </a:prstGeom>
+          <a:noFill/>
+        </p:spPr>
+        <p:txBody>
+          <a:bodyPr wrap="square">
+            <a:spAutoFit/>
+          </a:bodyPr>
+          <a:lstStyle/>
+          <a:p>
+            <a:r>
+              <a:rPr sz="2600" b="1">
+                <a:solidFill>
+                  <a:srgbClr val="0B3D2E"/>
+                </a:solidFill>
+              </a:rPr>
+              <a:t>❓ Preguntas frecuentes</a:t>
+            </a:r>
+          </a:p>
+        </p:txBody>
+      </p:sp>
+      <p:sp>
+        <p:nvSpPr>
+          <p:cNvPr id="3" name="TextBox 2"/>
+          <p:cNvSpPr txBox="1"/>
+          <p:nvPr/>
+        </p:nvSpPr>
+        <p:spPr>
+          <a:xfrm>
+            <a:off x="457200" y="1280160"/>
+            <a:ext cx="8229600" cy="4937760"/>
+          </a:xfrm>
+          <a:prstGeom prst="rect">
+            <a:avLst/>
+          </a:prstGeom>
+          <a:noFill/>
+        </p:spPr>
+        <p:txBody>
+          <a:bodyPr wrap="square">
+            <a:spAutoFit/>
+          </a:bodyPr>
+          <a:lstStyle/>
+          <a:p>
+            <a:pPr>
+              <a:spcAft>
+                <a:spcPts val="600"/>
+              </a:spcAft>
+            </a:pPr>
+            <a:r>
+              <a:rPr sz="1500">
+                <a:solidFill>
+                  <a:srgbClr val="22282E"/>
+                </a:solidFill>
+              </a:rPr>
+              <a:t>•  ❓ ¿Cuál es la diferencia entre gobierno y gestión?</a:t>
+            </a:r>
+          </a:p>
+          <a:p>
+            <a:pPr>
+              <a:spcAft>
+                <a:spcPts val="600"/>
+              </a:spcAft>
+            </a:pPr>
+            <a:r>
+              <a:rPr sz="1500">
+                <a:solidFill>
+                  <a:srgbClr val="22282E"/>
+                </a:solidFill>
+              </a:rPr>
+              <a:t>•  El gobierno fija la dirección, el apetito de riesgo y la rendición de cuentas (nivel junta/CISO); la gestión ejecuta esa dirección con procesos y controles. Gobierno decide qué y por qué; gestión…</a:t>
+            </a:r>
+          </a:p>
+          <a:p>
+            <a:pPr>
+              <a:spcAft>
+                <a:spcPts val="600"/>
+              </a:spcAft>
+            </a:pPr>
+            <a:r>
+              <a:rPr sz="1500">
+                <a:solidFill>
+                  <a:srgbClr val="22282E"/>
+                </a:solidFill>
+              </a:rPr>
+              <a:t>•  ❓ ¿ISO 27001 o NIST CSF?</a:t>
+            </a:r>
+          </a:p>
+          <a:p>
+            <a:pPr>
+              <a:spcAft>
+                <a:spcPts val="600"/>
+              </a:spcAft>
+            </a:pPr>
+            <a:r>
+              <a:rPr sz="1500">
+                <a:solidFill>
+                  <a:srgbClr val="22282E"/>
+                </a:solidFill>
+              </a:rPr>
+              <a:t>•  ISO 27001 es certificable y orientado a un SGSI auditable por terceros; NIST CSF 2.0 es flexible y basado en resultados/funciones. Muchas organizaciones usan CSF para comunicar postura y 27001/800-53…</a:t>
+            </a:r>
+          </a:p>
+          <a:p>
+            <a:pPr>
+              <a:spcAft>
+                <a:spcPts val="600"/>
+              </a:spcAft>
+            </a:pPr>
+            <a:r>
+              <a:rPr sz="1500">
+                <a:solidFill>
+                  <a:srgbClr val="22282E"/>
+                </a:solidFill>
+              </a:rPr>
+              <a:t>•  ❓ ¿Qué es más importante, cumplir la regulación o reducir riesgo?</a:t>
+            </a:r>
+          </a:p>
+          <a:p>
+            <a:pPr>
+              <a:spcAft>
+                <a:spcPts val="600"/>
+              </a:spcAft>
+            </a:pPr>
+            <a:r>
+              <a:rPr sz="1500">
+                <a:solidFill>
+                  <a:srgbClr val="22282E"/>
+                </a:solidFill>
+              </a:rPr>
+              <a:t>•  Ambos, pero no son lo mismo: el cumplimiento es un piso mínimo obligatorio; la gestión de riesgo puede exigir más. Un programa maduro cumple la ley y trata el riesgo residual según su apetito.</a:t>
+            </a:r>
+          </a:p>
+          <a:p>
+            <a:pPr>
+              <a:spcAft>
+                <a:spcPts val="600"/>
+              </a:spcAft>
+            </a:pPr>
+            <a:r>
+              <a:rPr sz="1500">
+                <a:solidFill>
+                  <a:srgbClr val="22282E"/>
+                </a:solidFill>
+              </a:rPr>
+              <a:t>•  ❓ ¿Cada cuánto se revisan las políticas?</a:t>
+            </a:r>
+          </a:p>
+        </p:txBody>
+      </p:sp>
+    </p:spTree>
+  </p:cSld>
+  <p:clrMapOvr>
+    <a:masterClrMapping/>
+  </p:clrMapOvr>
+</p:sld>
+</file>
+
+<file path=ppt/slides/slide15.xml><?xml version="1.0" encoding="utf-8"?>
+<p:sld xmlns:a="http://schemas.openxmlformats.org/drawingml/2006/main" xmlns:p="http://schemas.openxmlformats.org/presentationml/2006/main" xmlns:r="http://schemas.openxmlformats.org/officeDocument/2006/relationships">
+  <p:cSld>
+    <p:spTree>
+      <p:nvGrpSpPr>
+        <p:cNvPr id="1" name=""/>
+        <p:cNvGrpSpPr/>
+        <p:nvPr/>
+      </p:nvGrpSpPr>
+      <p:grpSpPr/>
+      <p:sp>
+        <p:nvSpPr>
+          <p:cNvPr id="2" name="TextBox 1"/>
+          <p:cNvSpPr txBox="1"/>
+          <p:nvPr/>
+        </p:nvSpPr>
+        <p:spPr>
+          <a:xfrm>
+            <a:off x="457200" y="320040"/>
+            <a:ext cx="8229600" cy="822960"/>
+          </a:xfrm>
+          <a:prstGeom prst="rect">
+            <a:avLst/>
+          </a:prstGeom>
+          <a:noFill/>
+        </p:spPr>
+        <p:txBody>
+          <a:bodyPr wrap="square">
+            <a:spAutoFit/>
+          </a:bodyPr>
+          <a:lstStyle/>
+          <a:p>
+            <a:r>
+              <a:rPr sz="2600" b="1">
+                <a:solidFill>
+                  <a:srgbClr val="0B3D2E"/>
+                </a:solidFill>
+              </a:rPr>
+              <a:t>🔗 Referencias</a:t>
+            </a:r>
+          </a:p>
+        </p:txBody>
+      </p:sp>
+      <p:sp>
+        <p:nvSpPr>
+          <p:cNvPr id="3" name="TextBox 2"/>
+          <p:cNvSpPr txBox="1"/>
+          <p:nvPr/>
+        </p:nvSpPr>
+        <p:spPr>
+          <a:xfrm>
+            <a:off x="457200" y="1280160"/>
+            <a:ext cx="8229600" cy="4937760"/>
+          </a:xfrm>
+          <a:prstGeom prst="rect">
+            <a:avLst/>
+          </a:prstGeom>
+          <a:noFill/>
+        </p:spPr>
+        <p:txBody>
+          <a:bodyPr wrap="square">
+            <a:spAutoFit/>
+          </a:bodyPr>
+          <a:lstStyle/>
+          <a:p>
+            <a:pPr>
+              <a:spcAft>
+                <a:spcPts val="600"/>
+              </a:spcAft>
+            </a:pPr>
+            <a:r>
+              <a:rPr sz="1500">
+                <a:solidFill>
+                  <a:srgbClr val="22282E"/>
+                </a:solidFill>
+              </a:rPr>
               <a:t>•  Chapple, Stewart &amp; Gibson. (ISC)² CISSP Official Study Guide, 9.ª ed., Sybex — Dominio 1.</a:t>
             </a:r>
           </a:p>
@@ -3644,6 +4170,81 @@
           </a:p>
         </p:txBody>
       </p:sp>
+    </p:spTree>
+  </p:cSld>
+  <p:clrMapOvr>
+    <a:masterClrMapping/>
+  </p:clrMapOvr>
+</p:sld>
+</file>
+
+<file path=ppt/slides/slide16.xml><?xml version="1.0" encoding="utf-8"?>
+<p:sld xmlns:a="http://schemas.openxmlformats.org/drawingml/2006/main" xmlns:p="http://schemas.openxmlformats.org/presentationml/2006/main" xmlns:r="http://schemas.openxmlformats.org/officeDocument/2006/relationships">
+  <p:cSld>
+    <p:spTree>
+      <p:nvGrpSpPr>
+        <p:cNvPr id="1" name=""/>
+        <p:cNvGrpSpPr/>
+        <p:nvPr/>
+      </p:nvGrpSpPr>
+      <p:grpSpPr/>
+      <p:sp>
+        <p:nvSpPr>
+          <p:cNvPr id="2" name="TextBox 1"/>
+          <p:cNvSpPr txBox="1"/>
+          <p:nvPr/>
+        </p:nvSpPr>
+        <p:spPr>
+          <a:xfrm>
+            <a:off x="457200" y="274320"/>
+            <a:ext cx="8229600" cy="640080"/>
+          </a:xfrm>
+          <a:prstGeom prst="rect">
+            <a:avLst/>
+          </a:prstGeom>
+          <a:noFill/>
+        </p:spPr>
+        <p:txBody>
+          <a:bodyPr wrap="square">
+            <a:spAutoFit/>
+          </a:bodyPr>
+          <a:lstStyle/>
+          <a:p>
+            <a:r>
+              <a:rPr sz="2200" b="1">
+                <a:solidFill>
+                  <a:srgbClr val="0B3D2E"/>
+                </a:solidFill>
+              </a:rPr>
+              <a:t>Diagrama de la clase</a:t>
+            </a:r>
+          </a:p>
+        </p:txBody>
+      </p:sp>
+      <p:pic>
+        <p:nvPicPr>
+          <p:cNvPr id="3" name="Picture 2" descr="dc91210116d31cce.png"/>
+          <p:cNvPicPr>
+            <a:picLocks noChangeAspect="1"/>
+          </p:cNvPicPr>
+          <p:nvPr/>
+        </p:nvPicPr>
+        <p:blipFill>
+          <a:blip r:embed="rId2"/>
+          <a:stretch>
+            <a:fillRect/>
+          </a:stretch>
+        </p:blipFill>
+        <p:spPr>
+          <a:xfrm>
+            <a:off x="457200" y="3319776"/>
+            <a:ext cx="8229600" cy="858527"/>
+          </a:xfrm>
+          <a:prstGeom prst="rect">
+            <a:avLst/>
+          </a:prstGeom>
+        </p:spPr>
+      </p:pic>
     </p:spTree>
   </p:cSld>
   <p:clrMapOvr>
@@ -3728,7 +4329,7 @@
                   <a:srgbClr val="22282E"/>
                 </a:solidFill>
               </a:rPr>
-              <a:t>•  Cerrar el programa entendiendo cómo se gobierna la seguridad: alinear el programa con los objetivos del negocio, elegir marcos de control, cumplir leyes y regulaciones, y gestionar el programa con políticas, roles, métricas y modelos de madurez. Es el dominio 1 de CISSP y el bloque de Program Management / Governance, Risk &amp; Compliance de Security+ —la capa que convierte controles técnicos aislados en un programa sostenible y auditable.</a:t>
+              <a:t>•  Cerrar el programa entendiendo cómo se gobierna la seguridad: alinear el programa con los objetivos del negocio, elegir marcos de control, cumplir leyes y regulaciones, y gestionar el programa con…</a:t>
             </a:r>
           </a:p>
         </p:txBody>
@@ -4122,7 +4723,7 @@
                   <a:srgbClr val="0B3D2E"/>
                 </a:solidFill>
               </a:rPr>
-              <a:t>📖 Definiciones y características</a:t>
+              <a:t>🧠 Modelo mental y caso de decisión</a:t>
             </a:r>
           </a:p>
         </p:txBody>
@@ -4160,97 +4761,22 @@
                   <a:srgbClr val="22282E"/>
                 </a:solidFill>
               </a:rPr>
-              <a:t>•  Gobierno de seguridad: dirección estratégica que alinea la seguridad con los objetivos del negocio, define apetito de riesgo y asigna responsabilidad. Característica clave: responde qué y por qué, mientras la gestión responde cómo.</a:t>
-            </a:r>
-          </a:p>
-          <a:p>
-            <a:pPr>
-              <a:spcAft>
-                <a:spcPts val="600"/>
-              </a:spcAft>
-            </a:pPr>
-            <a:r>
-              <a:rPr sz="1500">
-                <a:solidFill>
-                  <a:srgbClr val="22282E"/>
-                </a:solidFill>
-              </a:rPr>
-              <a:t>•  Debido cuidado (due care) y debida diligencia (due diligence): due care es actuar como una persona prudente lo haría (implementar controles); due diligence es investigar y validar continuamente que se hace bien. Característica clave: reducen la responsabilidad legal por negligencia.</a:t>
-            </a:r>
-          </a:p>
-          <a:p>
-            <a:pPr>
-              <a:spcAft>
-                <a:spcPts val="600"/>
-              </a:spcAft>
-            </a:pPr>
-            <a:r>
-              <a:rPr sz="1500">
-                <a:solidFill>
-                  <a:srgbClr val="22282E"/>
-                </a:solidFill>
-              </a:rPr>
-              <a:t>•  Marco de control: estructura de referencia. NIST CSF (Identificar/Proteger/Detectar/Responder/Recuperar/Gobernar), ISO/IEC 27001 (SGSI certificable), NIST SP 800-53 (catálogo de controles), CIS Controls (priorizados y accionables), COBIT (gobierno de TI). Característica clave: no se compite, se combinan según necesidad y contexto regulatorio.</a:t>
-            </a:r>
-          </a:p>
-          <a:p>
-            <a:pPr>
-              <a:spcAft>
-                <a:spcPts val="600"/>
-              </a:spcAft>
-            </a:pPr>
-            <a:r>
-              <a:rPr sz="1500">
-                <a:solidFill>
-                  <a:srgbClr val="22282E"/>
-                </a:solidFill>
-              </a:rPr>
-              <a:t>•  Política / estándar / procedimiento / guía: la política es mandatoria y de alto nivel; el estándar fija requisitos obligatorios (p. ej. cifrado AES-256); el procedimiento son pasos operativos; la guía (baseline/guideline) es recomendación. Característica clave: jerarquía descendente de generalidad a especificidad.</a:t>
-            </a:r>
-          </a:p>
-          <a:p>
-            <a:pPr>
-              <a:spcAft>
-                <a:spcPts val="600"/>
-              </a:spcAft>
-            </a:pPr>
-            <a:r>
-              <a:rPr sz="1500">
-                <a:solidFill>
-                  <a:srgbClr val="22282E"/>
-                </a:solidFill>
-              </a:rPr>
-              <a:t>•  Regulación vs marco: una regulación (GDPR, HIPAA, PCI DSS, SOX, LGPD) es de cumplimiento obligatorio con sanciones; un marco es voluntario/estructural. Característica clave: el incumplimiento regulatorio tiene consecuencias legales/financieras.</a:t>
-            </a:r>
-          </a:p>
-          <a:p>
-            <a:pPr>
-              <a:spcAft>
-                <a:spcPts val="600"/>
-              </a:spcAft>
-            </a:pPr>
-            <a:r>
-              <a:rPr sz="1500">
-                <a:solidFill>
-                  <a:srgbClr val="22282E"/>
-                </a:solidFill>
-              </a:rPr>
-              <a:t>•  Apetito y tolerancia al riesgo: nivel de riesgo que la organización está dispuesta a aceptar para lograr objetivos. Característica clave: guía qué se remedia, transfiere, mitiga o acepta.</a:t>
-            </a:r>
-          </a:p>
-          <a:p>
-            <a:pPr>
-              <a:spcAft>
-                <a:spcPts val="600"/>
-              </a:spcAft>
-            </a:pPr>
-            <a:r>
-              <a:rPr sz="1500">
-                <a:solidFill>
-                  <a:srgbClr val="22282E"/>
-                </a:solidFill>
-              </a:rPr>
-              <a:t>•  KPI vs KRI: un KPI mide desempeño (p. ej. % de parches en SLA); un KRI es un indicador anticipado de riesgo (p. ej. nº de cuentas privilegiadas sin MFA). Característica clave: KPIs miran el pasado, KRIs anticipan problemas.</a:t>
+              <a:t>•  La obligación se determina por jurisdicción, entidad, dato y evento; el equipo técnico preserva hechos y coordina asesoría competente.</a:t>
+            </a:r>
+          </a:p>
+          <a:p>
+            <a:pPr>
+              <a:spcAft>
+                <a:spcPts val="600"/>
+              </a:spcAft>
+            </a:pPr>
+            <a:r>
+              <a:rPr sz="1500">
+                <a:solidFill>
+                  <a:srgbClr val="22282E"/>
+                </a:solidFill>
+              </a:rPr>
+              <a:t>•  Caso razonado. Un plazo de notificación varía por régimen. Se evita prometer una regla universal y se activa la matriz jurídica.</a:t>
             </a:r>
           </a:p>
         </p:txBody>
@@ -4301,7 +4827,7 @@
                   <a:srgbClr val="0B3D2E"/>
                 </a:solidFill>
               </a:rPr>
-              <a:t>🧰 Herramientas y preparación</a:t>
+              <a:t>📔 Glosario operativo complementario</a:t>
             </a:r>
           </a:p>
         </p:txBody>
@@ -4339,82 +4865,52 @@
                   <a:srgbClr val="22282E"/>
                 </a:solidFill>
               </a:rPr>
-              <a:t>•  Clase de GRC; el "entorno" es documental y de mapeo:</a:t>
-            </a:r>
-          </a:p>
-          <a:p>
-            <a:pPr>
-              <a:spcAft>
-                <a:spcPts val="600"/>
-              </a:spcAft>
-            </a:pPr>
-            <a:r>
-              <a:rPr sz="1500">
-                <a:solidFill>
-                  <a:srgbClr val="22282E"/>
-                </a:solidFill>
-              </a:rPr>
-              <a:t>•  Plantillas de política (SANS Security Policy Templates) como punto de partida —adáptalas, no las copies literalmente.</a:t>
-            </a:r>
-          </a:p>
-          <a:p>
-            <a:pPr>
-              <a:spcAft>
-                <a:spcPts val="600"/>
-              </a:spcAft>
-            </a:pPr>
-            <a:r>
-              <a:rPr sz="1500">
-                <a:solidFill>
-                  <a:srgbClr val="22282E"/>
-                </a:solidFill>
-              </a:rPr>
-              <a:t>•  Hoja de cálculo para el mapeo control ↔ marco ↔ regulación y para el RACI.</a:t>
-            </a:r>
-          </a:p>
-          <a:p>
-            <a:pPr>
-              <a:spcAft>
-                <a:spcPts val="600"/>
-              </a:spcAft>
-            </a:pPr>
-            <a:r>
-              <a:rPr sz="1500">
-                <a:solidFill>
-                  <a:srgbClr val="22282E"/>
-                </a:solidFill>
-              </a:rPr>
-              <a:t>•  NIST CSF 2.0 y CIS Controls v8 (descargables gratis) como marcos base.</a:t>
-            </a:r>
-          </a:p>
-          <a:p>
-            <a:pPr>
-              <a:spcAft>
-                <a:spcPts val="600"/>
-              </a:spcAft>
-            </a:pPr>
-            <a:r>
-              <a:rPr sz="1500">
-                <a:solidFill>
-                  <a:srgbClr val="22282E"/>
-                </a:solidFill>
-              </a:rPr>
-              <a:t>•  Herramienta de diagrama para el organigrama de gobierno y el flujo de aprobación de políticas.</a:t>
-            </a:r>
-          </a:p>
-          <a:p>
-            <a:pPr>
-              <a:spcAft>
-                <a:spcPts val="600"/>
-              </a:spcAft>
-            </a:pPr>
-            <a:r>
-              <a:rPr sz="1500">
-                <a:solidFill>
-                  <a:srgbClr val="22282E"/>
-                </a:solidFill>
-              </a:rPr>
-              <a:t>•  Registro de riesgos (risk register) en formato tabla: riesgo, dueño, probabilidad, impacto, tratamiento, estado.</a:t>
+              <a:t>•  Término — Definición</a:t>
+            </a:r>
+          </a:p>
+          <a:p>
+            <a:pPr>
+              <a:spcAft>
+                <a:spcPts val="600"/>
+              </a:spcAft>
+            </a:pPr>
+            <a:r>
+              <a:rPr sz="1500">
+                <a:solidFill>
+                  <a:srgbClr val="22282E"/>
+                </a:solidFill>
+              </a:rPr>
+              <a:t>•  Evidencia — Información cuya procedencia y relación con un criterio pueden revisarse.</a:t>
+            </a:r>
+          </a:p>
+          <a:p>
+            <a:pPr>
+              <a:spcAft>
+                <a:spcPts val="600"/>
+              </a:spcAft>
+            </a:pPr>
+            <a:r>
+              <a:rPr sz="1500">
+                <a:solidFill>
+                  <a:srgbClr val="22282E"/>
+                </a:solidFill>
+              </a:rPr>
+              <a:t>•  Supuesto — Condición declarada de la que depende una conclusión.</a:t>
+            </a:r>
+          </a:p>
+          <a:p>
+            <a:pPr>
+              <a:spcAft>
+                <a:spcPts val="600"/>
+              </a:spcAft>
+            </a:pPr>
+            <a:r>
+              <a:rPr sz="1500">
+                <a:solidFill>
+                  <a:srgbClr val="22282E"/>
+                </a:solidFill>
+              </a:rPr>
+              <a:t>•  Riesgo residual — Exposición que permanece después del tratamiento.</a:t>
             </a:r>
           </a:p>
         </p:txBody>
@@ -4465,7 +4961,7 @@
                   <a:srgbClr val="0B3D2E"/>
                 </a:solidFill>
               </a:rPr>
-              <a:t>🧪 Laboratorio guiado — Redactar una política y mapearla a marcos y regulación</a:t>
+              <a:t>✅ Criterio de dominio</a:t>
             </a:r>
           </a:p>
         </p:txBody>
@@ -4503,97 +4999,7 @@
                   <a:srgbClr val="22282E"/>
                 </a:solidFill>
               </a:rPr>
-              <a:t>•  Ejercicio aplicado: redactarás una política de seguridad de una organización ficticia y la conectarás con marcos, regulación y métricas.</a:t>
-            </a:r>
-          </a:p>
-          <a:p>
-            <a:pPr>
-              <a:spcAft>
-                <a:spcPts val="600"/>
-              </a:spcAft>
-            </a:pPr>
-            <a:r>
-              <a:rPr sz="1500">
-                <a:solidFill>
-                  <a:srgbClr val="22282E"/>
-                </a:solidFill>
-              </a:rPr>
-              <a:t>•  Define el contexto. Elige una organización ficticia (p. ej. clínica que procesa datos de salud y pagos con tarjeta). Identifica qué regulaciones aplican (HIPAA por salud, PCI DSS por tarjetas, GDPR/LGPD si hay datos de la UE/Brasil).</a:t>
-            </a:r>
-          </a:p>
-          <a:p>
-            <a:pPr>
-              <a:spcAft>
-                <a:spcPts val="600"/>
-              </a:spcAft>
-            </a:pPr>
-            <a:r>
-              <a:rPr sz="1500">
-                <a:solidFill>
-                  <a:srgbClr val="22282E"/>
-                </a:solidFill>
-              </a:rPr>
-              <a:t>•  Establece el gobierno. Dibuja el organigrama: junta directiva → CISO → equipos. Define un RACI para "aprobación de políticas" y "respuesta a incidentes".</a:t>
-            </a:r>
-          </a:p>
-          <a:p>
-            <a:pPr>
-              <a:spcAft>
-                <a:spcPts val="600"/>
-              </a:spcAft>
-            </a:pPr>
-            <a:r>
-              <a:rPr sz="1500">
-                <a:solidFill>
-                  <a:srgbClr val="22282E"/>
-                </a:solidFill>
-              </a:rPr>
-              <a:t>•  Redacta la política madre. Una Política de Seguridad de la Información de alto nivel: propósito, alcance, roles, principios (CIA), cumplimiento y sanciones, y quién la aprueba/revisa (cadencia anual).</a:t>
-            </a:r>
-          </a:p>
-          <a:p>
-            <a:pPr>
-              <a:spcAft>
-                <a:spcPts val="600"/>
-              </a:spcAft>
-            </a:pPr>
-            <a:r>
-              <a:rPr sz="1500">
-                <a:solidFill>
-                  <a:srgbClr val="22282E"/>
-                </a:solidFill>
-              </a:rPr>
-              <a:t>•  Deriva la jerarquía. Para un tema (p. ej. control de acceso), escribe: la política (declaración), un estándar (MFA obligatorio para accesos privilegiados), un procedimiento (pasos de alta/baja de cuentas) y una guía (recomendaciones de contraseñas).</a:t>
-            </a:r>
-          </a:p>
-          <a:p>
-            <a:pPr>
-              <a:spcAft>
-                <a:spcPts val="600"/>
-              </a:spcAft>
-            </a:pPr>
-            <a:r>
-              <a:rPr sz="1500">
-                <a:solidFill>
-                  <a:srgbClr val="22282E"/>
-                </a:solidFill>
-              </a:rPr>
-              <a:t>•  Elige un marco base. Selecciona NIST CSF 2.0 o ISO 27001 y justifica por qué encaja con el contexto.</a:t>
-            </a:r>
-          </a:p>
-          <a:p>
-            <a:pPr>
-              <a:spcAft>
-                <a:spcPts val="600"/>
-              </a:spcAft>
-            </a:pPr>
-            <a:r>
-              <a:rPr sz="1500">
-                <a:solidFill>
-                  <a:srgbClr val="22282E"/>
-                </a:solidFill>
-              </a:rPr>
-              <a:t>•  Mapea controles. En la hoja de cálculo, cruza: requisito de la política → función/control del marco (p. ej. CSF PR.AA) → requisito regulatorio (p. ej. PCI DSS 8.x, HIPAA §164.312). Marca cobertura y huecos.</a:t>
+              <a:t>•  El alumno demuestra dominio cuando explica el diagrama, resuelve el caso con evidencia, declara límites y puede defender por qué su decisión cambia si cambia un supuesto.</a:t>
             </a:r>
           </a:p>
         </p:txBody>
@@ -4644,7 +5050,7 @@
                   <a:srgbClr val="0B3D2E"/>
                 </a:solidFill>
               </a:rPr>
-              <a:t>✍️ Ejercicios</a:t>
+              <a:t>📖 Definiciones y características</a:t>
             </a:r>
           </a:p>
         </p:txBody>
@@ -4682,82 +5088,97 @@
                   <a:srgbClr val="22282E"/>
                 </a:solidFill>
               </a:rPr>
-              <a:t>•  Clasifica cinco enunciados como política, estándar, procedimiento o guía y corrige los mal ubicados.</a:t>
-            </a:r>
-          </a:p>
-          <a:p>
-            <a:pPr>
-              <a:spcAft>
-                <a:spcPts val="600"/>
-              </a:spcAft>
-            </a:pPr>
-            <a:r>
-              <a:rPr sz="1500">
-                <a:solidFill>
-                  <a:srgbClr val="22282E"/>
-                </a:solidFill>
-              </a:rPr>
-              <a:t>•  Mapea tres controles a NIST CSF 2.0 y al artículo/requisito correspondiente de una regulación.</a:t>
-            </a:r>
-          </a:p>
-          <a:p>
-            <a:pPr>
-              <a:spcAft>
-                <a:spcPts val="600"/>
-              </a:spcAft>
-            </a:pPr>
-            <a:r>
-              <a:rPr sz="1500">
-                <a:solidFill>
-                  <a:srgbClr val="22282E"/>
-                </a:solidFill>
-              </a:rPr>
-              <a:t>•  Explica con un caso la diferencia entre due care y due diligence y cómo cada una reduce responsabilidad legal.</a:t>
-            </a:r>
-          </a:p>
-          <a:p>
-            <a:pPr>
-              <a:spcAft>
-                <a:spcPts val="600"/>
-              </a:spcAft>
-            </a:pPr>
-            <a:r>
-              <a:rPr sz="1500">
-                <a:solidFill>
-                  <a:srgbClr val="22282E"/>
-                </a:solidFill>
-              </a:rPr>
-              <a:t>•  Diseña un RACI para el proceso de gestión de cambios de seguridad.</a:t>
-            </a:r>
-          </a:p>
-          <a:p>
-            <a:pPr>
-              <a:spcAft>
-                <a:spcPts val="600"/>
-              </a:spcAft>
-            </a:pPr>
-            <a:r>
-              <a:rPr sz="1500">
-                <a:solidFill>
-                  <a:srgbClr val="22282E"/>
-                </a:solidFill>
-              </a:rPr>
-              <a:t>•  Define dos KRIs con umbral que anticipen un incidente de accesos.</a:t>
-            </a:r>
-          </a:p>
-          <a:p>
-            <a:pPr>
-              <a:spcAft>
-                <a:spcPts val="600"/>
-              </a:spcAft>
-            </a:pPr>
-            <a:r>
-              <a:rPr sz="1500">
-                <a:solidFill>
-                  <a:srgbClr val="22282E"/>
-                </a:solidFill>
-              </a:rPr>
-              <a:t>•  Sitúa un programa descrito en un nivel CMMI y justifica el diagnóstico.</a:t>
+              <a:t>•  Gobierno de seguridad: dirección estratégica que alinea la seguridad con los objetivos del negocio, define apetito de riesgo y asigna responsabilidad. Característica clave: responde qué y por qué…</a:t>
+            </a:r>
+          </a:p>
+          <a:p>
+            <a:pPr>
+              <a:spcAft>
+                <a:spcPts val="600"/>
+              </a:spcAft>
+            </a:pPr>
+            <a:r>
+              <a:rPr sz="1500">
+                <a:solidFill>
+                  <a:srgbClr val="22282E"/>
+                </a:solidFill>
+              </a:rPr>
+              <a:t>•  Debido cuidado (due care) y debida diligencia (due diligence): due care es actuar como una persona prudente lo haría (implementar controles); due diligence es investigar y validar continuamente que…</a:t>
+            </a:r>
+          </a:p>
+          <a:p>
+            <a:pPr>
+              <a:spcAft>
+                <a:spcPts val="600"/>
+              </a:spcAft>
+            </a:pPr>
+            <a:r>
+              <a:rPr sz="1500">
+                <a:solidFill>
+                  <a:srgbClr val="22282E"/>
+                </a:solidFill>
+              </a:rPr>
+              <a:t>•  Marco de control: estructura de referencia. NIST CSF (Identificar/Proteger/Detectar/Responder/Recuperar/Gobernar), ISO/IEC 27001 (SGSI certificable), NIST SP 800-53 (catálogo de controles), CIS…</a:t>
+            </a:r>
+          </a:p>
+          <a:p>
+            <a:pPr>
+              <a:spcAft>
+                <a:spcPts val="600"/>
+              </a:spcAft>
+            </a:pPr>
+            <a:r>
+              <a:rPr sz="1500">
+                <a:solidFill>
+                  <a:srgbClr val="22282E"/>
+                </a:solidFill>
+              </a:rPr>
+              <a:t>•  Política / estándar / procedimiento / guía: la política es mandatoria y de alto nivel; el estándar fija requisitos obligatorios (p. ej. cifrado AES-256); el procedimiento son pasos operativos; la…</a:t>
+            </a:r>
+          </a:p>
+          <a:p>
+            <a:pPr>
+              <a:spcAft>
+                <a:spcPts val="600"/>
+              </a:spcAft>
+            </a:pPr>
+            <a:r>
+              <a:rPr sz="1500">
+                <a:solidFill>
+                  <a:srgbClr val="22282E"/>
+                </a:solidFill>
+              </a:rPr>
+              <a:t>•  Regulación vs marco: una regulación (GDPR, HIPAA, PCI DSS, SOX, LGPD) es de cumplimiento obligatorio con sanciones; un marco es voluntario/estructural. Característica clave: el incumplimiento…</a:t>
+            </a:r>
+          </a:p>
+          <a:p>
+            <a:pPr>
+              <a:spcAft>
+                <a:spcPts val="600"/>
+              </a:spcAft>
+            </a:pPr>
+            <a:r>
+              <a:rPr sz="1500">
+                <a:solidFill>
+                  <a:srgbClr val="22282E"/>
+                </a:solidFill>
+              </a:rPr>
+              <a:t>•  Apetito y tolerancia al riesgo: nivel de riesgo que la organización está dispuesta a aceptar para lograr objetivos. Característica clave: guía qué se remedia, transfiere, mitiga o acepta.</a:t>
+            </a:r>
+          </a:p>
+          <a:p>
+            <a:pPr>
+              <a:spcAft>
+                <a:spcPts val="600"/>
+              </a:spcAft>
+            </a:pPr>
+            <a:r>
+              <a:rPr sz="1500">
+                <a:solidFill>
+                  <a:srgbClr val="22282E"/>
+                </a:solidFill>
+              </a:rPr>
+              <a:t>•  KPI vs KRI: un KPI mide desempeño (p. ej. % de parches en SLA); un KRI es un indicador anticipado de riesgo (p. ej. nº de cuentas privilegiadas sin MFA). Característica clave: KPIs miran el pasado…</a:t>
             </a:r>
           </a:p>
         </p:txBody>
@@ -4808,7 +5229,7 @@
                   <a:srgbClr val="0B3D2E"/>
                 </a:solidFill>
               </a:rPr>
-              <a:t>📝 Reto verificable</a:t>
+              <a:t>🧰 Herramientas y preparación</a:t>
             </a:r>
           </a:p>
         </p:txBody>
@@ -4846,97 +5267,82 @@
                   <a:srgbClr val="22282E"/>
                 </a:solidFill>
               </a:rPr>
-              <a:t>•  Reto: entrega el paquete de gobierno de una organización ficticia: política madre + jerarquía documental de un dominio + matriz de mapeo (marco ↔ regulación) + registro de riesgos + cuadro de KPIs/KRIs.</a:t>
-            </a:r>
-          </a:p>
-          <a:p>
-            <a:pPr>
-              <a:spcAft>
-                <a:spcPts val="600"/>
-              </a:spcAft>
-            </a:pPr>
-            <a:r>
-              <a:rPr sz="1500">
-                <a:solidFill>
-                  <a:srgbClr val="22282E"/>
-                </a:solidFill>
-              </a:rPr>
-              <a:t>•  Criterio de aceptación:</a:t>
-            </a:r>
-          </a:p>
-          <a:p>
-            <a:pPr>
-              <a:spcAft>
-                <a:spcPts val="600"/>
-              </a:spcAft>
-            </a:pPr>
-            <a:r>
-              <a:rPr sz="1500">
-                <a:solidFill>
-                  <a:srgbClr val="22282E"/>
-                </a:solidFill>
-              </a:rPr>
-              <a:t>•  La política madre incluye propósito, alcance, roles, cumplimiento, sanciones y cadencia de revisión con aprobador identificado.</a:t>
-            </a:r>
-          </a:p>
-          <a:p>
-            <a:pPr>
-              <a:spcAft>
-                <a:spcPts val="600"/>
-              </a:spcAft>
-            </a:pPr>
-            <a:r>
-              <a:rPr sz="1500">
-                <a:solidFill>
-                  <a:srgbClr val="22282E"/>
-                </a:solidFill>
-              </a:rPr>
-              <a:t>•  Se distinguen correctamente política, estándar, procedimiento y guía para el dominio elegido.</a:t>
-            </a:r>
-          </a:p>
-          <a:p>
-            <a:pPr>
-              <a:spcAft>
-                <a:spcPts val="600"/>
-              </a:spcAft>
-            </a:pPr>
-            <a:r>
-              <a:rPr sz="1500">
-                <a:solidFill>
-                  <a:srgbClr val="22282E"/>
-                </a:solidFill>
-              </a:rPr>
-              <a:t>•  El mapeo conecta cada requisito con un control de marco y un requisito regulatorio aplicable, señalando huecos.</a:t>
-            </a:r>
-          </a:p>
-          <a:p>
-            <a:pPr>
-              <a:spcAft>
-                <a:spcPts val="600"/>
-              </a:spcAft>
-            </a:pPr>
-            <a:r>
-              <a:rPr sz="1500">
-                <a:solidFill>
-                  <a:srgbClr val="22282E"/>
-                </a:solidFill>
-              </a:rPr>
-              <a:t>•  El registro de riesgos usa probabilidad × impacto, dueño y tratamiento coherente con el apetito de riesgo.</a:t>
-            </a:r>
-          </a:p>
-          <a:p>
-            <a:pPr>
-              <a:spcAft>
-                <a:spcPts val="600"/>
-              </a:spcAft>
-            </a:pPr>
-            <a:r>
-              <a:rPr sz="1500">
-                <a:solidFill>
-                  <a:srgbClr val="22282E"/>
-                </a:solidFill>
-              </a:rPr>
-              <a:t>•  Hay al menos 3 KPIs y 2 KRIs con umbral y frecuencia, más una evaluación de madurez con acción de mejora.</a:t>
+              <a:t>•  Clase de GRC; el "entorno" es documental y de mapeo:</a:t>
+            </a:r>
+          </a:p>
+          <a:p>
+            <a:pPr>
+              <a:spcAft>
+                <a:spcPts val="600"/>
+              </a:spcAft>
+            </a:pPr>
+            <a:r>
+              <a:rPr sz="1500">
+                <a:solidFill>
+                  <a:srgbClr val="22282E"/>
+                </a:solidFill>
+              </a:rPr>
+              <a:t>•  Plantillas de política (SANS Security Policy Templates) como punto de partida —adáptalas, no las copies literalmente.</a:t>
+            </a:r>
+          </a:p>
+          <a:p>
+            <a:pPr>
+              <a:spcAft>
+                <a:spcPts val="600"/>
+              </a:spcAft>
+            </a:pPr>
+            <a:r>
+              <a:rPr sz="1500">
+                <a:solidFill>
+                  <a:srgbClr val="22282E"/>
+                </a:solidFill>
+              </a:rPr>
+              <a:t>•  Hoja de cálculo para el mapeo control ↔ marco ↔ regulación y para el RACI.</a:t>
+            </a:r>
+          </a:p>
+          <a:p>
+            <a:pPr>
+              <a:spcAft>
+                <a:spcPts val="600"/>
+              </a:spcAft>
+            </a:pPr>
+            <a:r>
+              <a:rPr sz="1500">
+                <a:solidFill>
+                  <a:srgbClr val="22282E"/>
+                </a:solidFill>
+              </a:rPr>
+              <a:t>•  NIST CSF 2.0 y CIS Controls v8 (descargables gratis) como marcos base.</a:t>
+            </a:r>
+          </a:p>
+          <a:p>
+            <a:pPr>
+              <a:spcAft>
+                <a:spcPts val="600"/>
+              </a:spcAft>
+            </a:pPr>
+            <a:r>
+              <a:rPr sz="1500">
+                <a:solidFill>
+                  <a:srgbClr val="22282E"/>
+                </a:solidFill>
+              </a:rPr>
+              <a:t>•  Herramienta de diagrama para el organigrama de gobierno y el flujo de aprobación de políticas.</a:t>
+            </a:r>
+          </a:p>
+          <a:p>
+            <a:pPr>
+              <a:spcAft>
+                <a:spcPts val="600"/>
+              </a:spcAft>
+            </a:pPr>
+            <a:r>
+              <a:rPr sz="1500">
+                <a:solidFill>
+                  <a:srgbClr val="22282E"/>
+                </a:solidFill>
+              </a:rPr>
+              <a:t>•  Registro de riesgos (risk register) en formato tabla: riesgo, dueño, probabilidad, impacto, tratamiento, estado.</a:t>
             </a:r>
           </a:p>
         </p:txBody>
